--- a/최종 보고서/개정알리미_발표자료.pptx
+++ b/최종 보고서/개정알리미_발표자료.pptx
@@ -26,6 +26,8 @@
     <p:sldId id="271" r:id="rId27"/>
     <p:sldId id="272" r:id="rId28"/>
     <p:sldId id="273" r:id="rId29"/>
+    <p:sldId id="274" r:id="rId30"/>
+    <p:sldId id="275" r:id="rId31"/>
   </p:sldIdLst>
   <p:sldSz cx="18288000" cy="10287000"/>
   <p:notesSz cx="6858000" cy="9144000"/>
@@ -13249,6 +13251,103 @@
 </p:sld>
 </file>
 
+<file path=ppt/slides/slide19.xml><?xml version="1.0" encoding="utf-8"?>
+<p:sld xmlns:a="http://schemas.openxmlformats.org/drawingml/2006/main" xmlns:p="http://schemas.openxmlformats.org/presentationml/2006/main" xmlns:r="http://schemas.openxmlformats.org/officeDocument/2006/relationships">
+  <p:cSld>
+    <p:spTree>
+      <p:nvGrpSpPr>
+        <p:cNvPr id="1" name=""/>
+        <p:cNvGrpSpPr/>
+        <p:nvPr/>
+      </p:nvGrpSpPr>
+      <p:grpSpPr/>
+      <p:sp>
+        <p:nvSpPr>
+          <p:cNvPr id="2" name="TextBox 1"/>
+          <p:cNvSpPr txBox="1"/>
+          <p:nvPr/>
+        </p:nvSpPr>
+        <p:spPr>
+          <a:xfrm>
+            <a:off x="4937760" y="3767328"/>
+            <a:ext cx="8403336" cy="539496"/>
+          </a:xfrm>
+          <a:prstGeom prst="rect">
+            <a:avLst/>
+          </a:prstGeom>
+          <a:noFill/>
+        </p:spPr>
+        <p:txBody>
+          <a:bodyPr wrap="none">
+            <a:spAutoFit/>
+          </a:bodyPr>
+          <a:lstStyle/>
+          <a:p>
+            <a:pPr algn="ctr"/>
+            <a:r>
+              <a:rPr sz="4139" b="1">
+                <a:solidFill>
+                  <a:srgbClr val="333333"/>
+                </a:solidFill>
+                <a:latin typeface="프리텐다드 Bold"/>
+              </a:rPr>
+              <a:t>바뀐 법을 지키는 일은,</a:t>
+            </a:r>
+          </a:p>
+        </p:txBody>
+      </p:sp>
+      <p:sp>
+        <p:nvSpPr>
+          <p:cNvPr id="3" name="TextBox 2"/>
+          <p:cNvSpPr txBox="1"/>
+          <p:nvPr/>
+        </p:nvSpPr>
+        <p:spPr>
+          <a:xfrm>
+            <a:off x="4572000" y="4343400"/>
+            <a:ext cx="9144000" cy="630936"/>
+          </a:xfrm>
+          <a:prstGeom prst="rect">
+            <a:avLst/>
+          </a:prstGeom>
+          <a:noFill/>
+        </p:spPr>
+        <p:txBody>
+          <a:bodyPr wrap="none">
+            <a:spAutoFit/>
+          </a:bodyPr>
+          <a:lstStyle/>
+          <a:p>
+            <a:pPr algn="ctr"/>
+            <a:r>
+              <a:rPr sz="4140" b="1">
+                <a:solidFill>
+                  <a:srgbClr val="484BEF"/>
+                </a:solidFill>
+                <a:latin typeface="프리텐다드 Bold"/>
+              </a:rPr>
+              <a:t>바뀐 줄 아는 것</a:t>
+            </a:r>
+            <a:r>
+              <a:rPr sz="4139" b="1">
+                <a:solidFill>
+                  <a:srgbClr val="333333"/>
+                </a:solidFill>
+                <a:latin typeface="프리텐다드 Bold"/>
+              </a:rPr>
+              <a:t>에서 시작됩니다.</a:t>
+            </a:r>
+          </a:p>
+        </p:txBody>
+      </p:sp>
+    </p:spTree>
+  </p:cSld>
+  <p:clrMapOvr>
+    <a:masterClrMapping/>
+  </p:clrMapOvr>
+</p:sld>
+</file>
+
 <file path=ppt/slides/slide2.xml><?xml version="1.0" encoding="utf-8"?>
 <p:sld xmlns:a="http://schemas.openxmlformats.org/drawingml/2006/main" xmlns:p="http://schemas.openxmlformats.org/presentationml/2006/main" xmlns:r="http://schemas.openxmlformats.org/officeDocument/2006/relationships">
   <p:cSld>
@@ -14156,6 +14255,138 @@
                 <a:latin typeface="프리텐다드"/>
               </a:rPr>
               <a:t>6.1 결론</a:t>
+            </a:r>
+          </a:p>
+        </p:txBody>
+      </p:sp>
+    </p:spTree>
+  </p:cSld>
+  <p:clrMapOvr>
+    <a:masterClrMapping/>
+  </p:clrMapOvr>
+</p:sld>
+</file>
+
+<file path=ppt/slides/slide20.xml><?xml version="1.0" encoding="utf-8"?>
+<p:sld xmlns:a="http://schemas.openxmlformats.org/drawingml/2006/main" xmlns:p="http://schemas.openxmlformats.org/presentationml/2006/main" xmlns:r="http://schemas.openxmlformats.org/officeDocument/2006/relationships">
+  <p:cSld>
+    <p:spTree>
+      <p:nvGrpSpPr>
+        <p:cNvPr id="1" name=""/>
+        <p:cNvGrpSpPr/>
+        <p:nvPr/>
+      </p:nvGrpSpPr>
+      <p:grpSpPr/>
+      <p:sp>
+        <p:nvSpPr>
+          <p:cNvPr id="2" name="TextBox 1"/>
+          <p:cNvSpPr txBox="1"/>
+          <p:nvPr/>
+        </p:nvSpPr>
+        <p:spPr>
+          <a:xfrm>
+            <a:off x="4937760" y="3767328"/>
+            <a:ext cx="8403336" cy="539496"/>
+          </a:xfrm>
+          <a:prstGeom prst="rect">
+            <a:avLst/>
+          </a:prstGeom>
+          <a:noFill/>
+        </p:spPr>
+        <p:txBody>
+          <a:bodyPr wrap="none">
+            <a:spAutoFit/>
+          </a:bodyPr>
+          <a:lstStyle/>
+          <a:p>
+            <a:pPr algn="ctr"/>
+            <a:r>
+              <a:rPr sz="4139" b="1">
+                <a:solidFill>
+                  <a:srgbClr val="333333"/>
+                </a:solidFill>
+                <a:latin typeface="프리텐다드 Bold"/>
+              </a:rPr>
+              <a:t>바뀐 법을 지키는 일은,</a:t>
+            </a:r>
+          </a:p>
+        </p:txBody>
+      </p:sp>
+      <p:sp>
+        <p:nvSpPr>
+          <p:cNvPr id="3" name="TextBox 2"/>
+          <p:cNvSpPr txBox="1"/>
+          <p:nvPr/>
+        </p:nvSpPr>
+        <p:spPr>
+          <a:xfrm>
+            <a:off x="4572000" y="4343400"/>
+            <a:ext cx="9144000" cy="630936"/>
+          </a:xfrm>
+          <a:prstGeom prst="rect">
+            <a:avLst/>
+          </a:prstGeom>
+          <a:noFill/>
+        </p:spPr>
+        <p:txBody>
+          <a:bodyPr wrap="none">
+            <a:spAutoFit/>
+          </a:bodyPr>
+          <a:lstStyle/>
+          <a:p>
+            <a:pPr algn="ctr"/>
+            <a:r>
+              <a:rPr sz="4140" b="1">
+                <a:solidFill>
+                  <a:srgbClr val="484BEF"/>
+                </a:solidFill>
+                <a:latin typeface="프리텐다드 Bold"/>
+              </a:rPr>
+              <a:t>바뀐 줄 아는 것</a:t>
+            </a:r>
+            <a:r>
+              <a:rPr sz="4139" b="1">
+                <a:solidFill>
+                  <a:srgbClr val="333333"/>
+                </a:solidFill>
+                <a:latin typeface="프리텐다드 Bold"/>
+              </a:rPr>
+              <a:t>에서 시작됩니다.</a:t>
+            </a:r>
+          </a:p>
+        </p:txBody>
+      </p:sp>
+      <p:sp>
+        <p:nvSpPr>
+          <p:cNvPr id="4" name="TextBox 3"/>
+          <p:cNvSpPr txBox="1"/>
+          <p:nvPr/>
+        </p:nvSpPr>
+        <p:spPr>
+          <a:xfrm>
+            <a:off x="4937760" y="5276088"/>
+            <a:ext cx="8403336" cy="548640"/>
+          </a:xfrm>
+          <a:prstGeom prst="rect">
+            <a:avLst/>
+          </a:prstGeom>
+          <a:noFill/>
+        </p:spPr>
+        <p:txBody>
+          <a:bodyPr wrap="none">
+            <a:spAutoFit/>
+          </a:bodyPr>
+          <a:lstStyle/>
+          <a:p>
+            <a:pPr algn="ctr"/>
+            <a:r>
+              <a:rPr sz="4140" b="1">
+                <a:solidFill>
+                  <a:srgbClr val="484BEF"/>
+                </a:solidFill>
+                <a:latin typeface="프리텐다드 Bold"/>
+              </a:rPr>
+              <a:t>개정알리미가 그 시작을 함께합니다.</a:t>
             </a:r>
           </a:p>
         </p:txBody>
